--- a/examples/pm7_splitted_insertion/splitted_insertion_guide.pptx
+++ b/examples/pm7_splitted_insertion/splitted_insertion_guide.pptx
@@ -587,9 +587,7 @@
               <a:t>NOTE_CONTENT_FORMAT: 1.0</a:t>
             </a:r>
           </a:p>
-          <a:p>
-            <a:endParaRPr/>
-          </a:p>
+          <a:p/>
           <a:p>
             <a:r>
               <a:t>===BLOCK===</a:t>
@@ -600,9 +598,7 @@
               <a:t>{{BLOCK:IMAGE}}</a:t>
             </a:r>
           </a:p>
-          <a:p>
-            <a:endParaRPr/>
-          </a:p>
+          <a:p/>
           <a:p>
             <a:r>
               <a:t>export-image-mode: slide_with_rectpct</a:t>
@@ -618,45 +614,34 @@
               <a:t>export-image: extracted/figures/&lt;__BASEFILENAME__&gt;_slide&lt;__SLIDENUM__&gt;_fig.png</a:t>
             </a:r>
           </a:p>
-          <a:p>
-            <a:endParaRPr/>
-          </a:p>
-          <a:p>
-            <a:r>
-              <a:rPr lang="en-US"/>
+          <a:p/>
+          <a:p>
+            <a:r>
               <a:t>===BLOCK===</a:t>
             </a:r>
           </a:p>
           <a:p>
             <a:r>
-              <a:rPr lang="en-US"/>
               <a:t>{{BLOCK:IMAGE}}</a:t>
             </a:r>
           </a:p>
-          <a:p>
-            <a:endParaRPr lang="en-US"/>
-          </a:p>
-          <a:p>
-            <a:r>
-              <a:rPr lang="en-US"/>
+          <a:p/>
+          <a:p>
+            <a:r>
               <a:t>export-image-mode: slide_with_rectpct</a:t>
             </a:r>
           </a:p>
           <a:p>
             <a:r>
-              <a:rPr lang="en-US"/>
               <a:t>export-image-target: keyvisual</a:t>
             </a:r>
           </a:p>
           <a:p>
             <a:r>
-              <a:rPr lang="en-US"/>
               <a:t>export-image: extracted/figures/&lt;__BASEFILENAME__&gt;_keyvisual.png</a:t>
             </a:r>
           </a:p>
-          <a:p>
-            <a:endParaRPr lang="en-US"/>
-          </a:p>
+          <a:p/>
           <a:p>
             <a:r>
               <a:t>===BLOCK===</a:t>
@@ -667,9 +652,7 @@
               <a:t>{{BLOCK:MD:LONG}}</a:t>
             </a:r>
           </a:p>
-          <a:p>
-            <a:endParaRPr/>
-          </a:p>
+          <a:p/>
           <a:p>
             <a:r>
               <a:t>export-note: extracted/&lt;__BASEFILENAME__&gt;_slide&lt;__SLIDENUM__&gt;_md.md</a:t>
@@ -685,88 +668,52 @@
               <a:t>## &lt;__TITLE__&gt;</a:t>
             </a:r>
           </a:p>
-          <a:p>
-            <a:endParaRPr/>
-          </a:p>
+          <a:p/>
           <a:p>
             <a:r>
               <a:t>pptxをマージする際、ファイル全体ではなく一部を選択して結合することができます。たとえば全体で4スライドあってもそのうちの2スライドのみ使う、といったことができます。</a:t>
             </a:r>
           </a:p>
-          <a:p>
-            <a:endParaRPr/>
-          </a:p>
-          <a:p>
-            <a:endParaRPr/>
-          </a:p>
-          <a:p>
-            <a:r>
-              <a:t>```{=latex}</a:t>
-            </a:r>
-          </a:p>
-          <a:p>
-            <a:r>
-              <a:t>\par\vspace{1\baselineskip}</a:t>
-            </a:r>
-          </a:p>
-          <a:p>
-            <a:r>
-              <a:t>\begin{center}</a:t>
-            </a:r>
-          </a:p>
-          <a:p>
-            <a:r>
-              <a:t>```</a:t>
-            </a:r>
-          </a:p>
-          <a:p>
-            <a:endParaRPr/>
-          </a:p>
+          <a:p/>
+          <a:p/>
+          <a:p>
+            <a:r>
+              <a:t>{{vspace:1}}</a:t>
+            </a:r>
+          </a:p>
+          <a:p/>
+          <a:p>
+            <a:r>
+              <a:t>::: {.center}</a:t>
+            </a:r>
+          </a:p>
+          <a:p/>
           <a:p>
             <a:r>
               <a:t>![](figures/&lt;__BASEFILENAME__&gt;_slide&lt;__SLIDENUM__&gt;_fig.png){ width=95% }</a:t>
             </a:r>
-            <a:endParaRPr lang="en-US"/>
-          </a:p>
-          <a:p>
-            <a:endParaRPr lang="en-US"/>
-          </a:p>
-          <a:p>
-            <a:r>
-              <a:rPr lang="en-US"/>
+          </a:p>
+          <a:p/>
+          <a:p>
+            <a:r>
               <a:t>![](figures/&lt;__BASEFILENAME__&gt;_keyvisual.png){ width=60% }</a:t>
             </a:r>
           </a:p>
-          <a:p>
-            <a:endParaRPr/>
-          </a:p>
-          <a:p>
-            <a:endParaRPr/>
-          </a:p>
-          <a:p>
-            <a:r>
-              <a:t>```{=latex}</a:t>
-            </a:r>
-          </a:p>
-          <a:p>
-            <a:r>
-              <a:t>\end{center}</a:t>
-            </a:r>
-          </a:p>
-          <a:p>
-            <a:r>
-              <a:t>\par\vspace{1\baselineskip}</a:t>
-            </a:r>
-          </a:p>
-          <a:p>
-            <a:r>
-              <a:t>```</a:t>
-            </a:r>
-            <a:endParaRPr lang="en-US"/>
-          </a:p>
-          <a:p>
-            <a:endParaRPr/>
-          </a:p>
+          <a:p/>
+          <a:p/>
+          <a:p>
+            <a:r>
+              <a:t>:::</a:t>
+            </a:r>
+          </a:p>
+          <a:p/>
+          <a:p>
+            <a:r>
+              <a:t>{{vspace:1}}</a:t>
+            </a:r>
+          </a:p>
+          <a:p/>
+          <a:p/>
         </p:txBody>
       </p:sp>
       <p:sp>
@@ -871,9 +818,7 @@
               <a:t>NOTE_CONTENT_FORMAT: 1.0</a:t>
             </a:r>
           </a:p>
-          <a:p>
-            <a:endParaRPr/>
-          </a:p>
+          <a:p/>
           <a:p>
             <a:r>
               <a:t>===BLOCK===</a:t>
@@ -884,9 +829,7 @@
               <a:t>{{BLOCK:IMAGE}}</a:t>
             </a:r>
           </a:p>
-          <a:p>
-            <a:endParaRPr/>
-          </a:p>
+          <a:p/>
           <a:p>
             <a:r>
               <a:t>export-image-mode: slide_with_rectpct</a:t>
@@ -902,9 +845,7 @@
               <a:t>export-image: extracted/figures/&lt;__BASEFILENAME__&gt;_slide&lt;__SLIDENUM__&gt;_fig.png</a:t>
             </a:r>
           </a:p>
-          <a:p>
-            <a:endParaRPr/>
-          </a:p>
+          <a:p/>
           <a:p>
             <a:r>
               <a:t>===BLOCK===</a:t>
@@ -915,9 +856,7 @@
               <a:t>{{BLOCK:MD:LONG}}</a:t>
             </a:r>
           </a:p>
-          <a:p>
-            <a:endParaRPr/>
-          </a:p>
+          <a:p/>
           <a:p>
             <a:r>
               <a:t>export-note: extracted/&lt;__BASEFILENAME__&gt;_slide&lt;__SLIDENUM__&gt;_md.md</a:t>
@@ -933,17 +872,13 @@
               <a:t>## &lt;__TITLE__&gt;</a:t>
             </a:r>
           </a:p>
-          <a:p>
-            <a:endParaRPr/>
-          </a:p>
+          <a:p/>
           <a:p>
             <a:r>
               <a:t>たとえば、既存の pptx ファイルに手を入れず、コピーも作らずに、</a:t>
             </a:r>
           </a:p>
-          <a:p>
-            <a:endParaRPr/>
-          </a:p>
+          <a:p/>
           <a:p>
             <a:r>
               <a:t>- 途中に臨時に別なスライドを差し込みたい</a:t>
@@ -954,72 +889,44 @@
               <a:t>- 中の一部スライドのみ使いたい</a:t>
             </a:r>
           </a:p>
-          <a:p>
-            <a:endParaRPr/>
-          </a:p>
+          <a:p/>
           <a:p>
             <a:r>
               <a:t>といった事情があるときは分割挿入機能を使いましょう。</a:t>
             </a:r>
           </a:p>
-          <a:p>
-            <a:endParaRPr/>
-          </a:p>
-          <a:p>
-            <a:r>
-              <a:t>```{=latex}</a:t>
-            </a:r>
-          </a:p>
-          <a:p>
-            <a:r>
-              <a:t>\par\vspace{1\baselineskip}</a:t>
-            </a:r>
-          </a:p>
-          <a:p>
-            <a:r>
-              <a:t>\begin{center}</a:t>
-            </a:r>
-          </a:p>
-          <a:p>
-            <a:r>
-              <a:t>```</a:t>
-            </a:r>
-          </a:p>
-          <a:p>
-            <a:endParaRPr/>
-          </a:p>
+          <a:p/>
+          <a:p>
+            <a:r>
+              <a:t>{{vspace:1}}</a:t>
+            </a:r>
+          </a:p>
+          <a:p/>
+          <a:p>
+            <a:r>
+              <a:t>::: {.center}</a:t>
+            </a:r>
+          </a:p>
+          <a:p/>
           <a:p>
             <a:r>
               <a:t>![](figures/&lt;__BASEFILENAME__&gt;_slide&lt;__SLIDENUM__&gt;_fig.png){ width=95% }</a:t>
             </a:r>
           </a:p>
-          <a:p>
-            <a:endParaRPr/>
-          </a:p>
-          <a:p>
-            <a:r>
-              <a:t>```{=latex}</a:t>
-            </a:r>
-          </a:p>
-          <a:p>
-            <a:r>
-              <a:t>\end{center}</a:t>
-            </a:r>
-          </a:p>
-          <a:p>
-            <a:r>
-              <a:t>\par\vspace{1\baselineskip}</a:t>
-            </a:r>
-          </a:p>
-          <a:p>
-            <a:r>
-              <a:t>```</a:t>
-            </a:r>
-            <a:endParaRPr lang="en-US"/>
-          </a:p>
-          <a:p>
-            <a:endParaRPr/>
-          </a:p>
+          <a:p/>
+          <a:p>
+            <a:r>
+              <a:t>:::</a:t>
+            </a:r>
+          </a:p>
+          <a:p/>
+          <a:p>
+            <a:r>
+              <a:t>{{vspace:1}}</a:t>
+            </a:r>
+          </a:p>
+          <a:p/>
+          <a:p/>
         </p:txBody>
       </p:sp>
       <p:sp>
@@ -1130,9 +1037,7 @@
               <a:t>NOTE_CONTENT_FORMAT: 1.0</a:t>
             </a:r>
           </a:p>
-          <a:p>
-            <a:endParaRPr/>
-          </a:p>
+          <a:p/>
           <a:p>
             <a:r>
               <a:t>===BLOCK===</a:t>
@@ -1143,9 +1048,7 @@
               <a:t>{{BLOCK:IMAGE}}</a:t>
             </a:r>
           </a:p>
-          <a:p>
-            <a:endParaRPr/>
-          </a:p>
+          <a:p/>
           <a:p>
             <a:r>
               <a:t>export-image-mode: slide_with_rectpct</a:t>
@@ -1161,9 +1064,7 @@
               <a:t>export-image: extracted/figures/&lt;__BASEFILENAME__&gt;_slide&lt;__SLIDENUM__&gt;_fig.png</a:t>
             </a:r>
           </a:p>
-          <a:p>
-            <a:endParaRPr/>
-          </a:p>
+          <a:p/>
           <a:p>
             <a:r>
               <a:t>===BLOCK===</a:t>
@@ -1174,9 +1075,7 @@
               <a:t>{{BLOCK:MD:LONG}}</a:t>
             </a:r>
           </a:p>
-          <a:p>
-            <a:endParaRPr/>
-          </a:p>
+          <a:p/>
           <a:p>
             <a:r>
               <a:t>export-note: extracted/&lt;__BASEFILENAME__&gt;_slide&lt;__SLIDENUM__&gt;_md.md</a:t>
@@ -1192,72 +1091,44 @@
               <a:t>## &lt;__TITLE__&gt;</a:t>
             </a:r>
           </a:p>
-          <a:p>
-            <a:endParaRPr/>
-          </a:p>
+          <a:p/>
           <a:p>
             <a:r>
               <a:t>分割挿入をするには、operation: insertpptx に slides: パラメータを追加します。 slides を省略すると all 扱いになります。スライド番号は1オリジンです。</a:t>
             </a:r>
           </a:p>
-          <a:p>
-            <a:endParaRPr/>
-          </a:p>
-          <a:p>
-            <a:r>
-              <a:t>```{=latex}</a:t>
-            </a:r>
-          </a:p>
-          <a:p>
-            <a:r>
-              <a:t>\par\vspace{1\baselineskip}</a:t>
-            </a:r>
-          </a:p>
-          <a:p>
-            <a:r>
-              <a:t>\begin{center}</a:t>
-            </a:r>
-          </a:p>
-          <a:p>
-            <a:r>
-              <a:t>```</a:t>
-            </a:r>
-          </a:p>
-          <a:p>
-            <a:endParaRPr/>
-          </a:p>
+          <a:p/>
+          <a:p>
+            <a:r>
+              <a:t>{{vspace:1}}</a:t>
+            </a:r>
+          </a:p>
+          <a:p/>
+          <a:p>
+            <a:r>
+              <a:t>::: {.center}</a:t>
+            </a:r>
+          </a:p>
+          <a:p/>
           <a:p>
             <a:r>
               <a:t>![](figures/&lt;__BASEFILENAME__&gt;_slide&lt;__SLIDENUM__&gt;_fig.png){ width=95% }</a:t>
             </a:r>
           </a:p>
-          <a:p>
-            <a:endParaRPr/>
-          </a:p>
-          <a:p>
-            <a:r>
-              <a:t>```{=latex}</a:t>
-            </a:r>
-          </a:p>
-          <a:p>
-            <a:r>
-              <a:t>\end{center}</a:t>
-            </a:r>
-          </a:p>
-          <a:p>
-            <a:r>
-              <a:t>\par\vspace{1\baselineskip}</a:t>
-            </a:r>
-          </a:p>
-          <a:p>
-            <a:r>
-              <a:t>```</a:t>
-            </a:r>
-            <a:endParaRPr lang="en-US"/>
-          </a:p>
-          <a:p>
-            <a:endParaRPr/>
-          </a:p>
+          <a:p/>
+          <a:p>
+            <a:r>
+              <a:t>:::</a:t>
+            </a:r>
+          </a:p>
+          <a:p/>
+          <a:p>
+            <a:r>
+              <a:t>{{vspace:1}}</a:t>
+            </a:r>
+          </a:p>
+          <a:p/>
+          <a:p/>
         </p:txBody>
       </p:sp>
       <p:sp>
